--- a/Презентація_НДП_Ходаков_Методи_Обробки_Зображень.pptx
+++ b/Презентація_НДП_Ходаков_Методи_Обробки_Зображень.pptx
@@ -15738,7 +15738,7 @@
                 <a:ea typeface="Calibri" pitchFamily="34" charset="-122"/>
                 <a:cs typeface="Calibri" pitchFamily="34" charset="-120"/>
               </a:rPr>
-              <a:t> + FCMAE pretraining [22]</a:t>
+              <a:t> FCMAE pretraining [22]</a:t>
             </a:r>
             <a:endParaRPr lang="en-US" sz="750" dirty="0"/>
           </a:p>
